--- a/게임기 대여 서비스 설계도.pptx
+++ b/게임기 대여 서비스 설계도.pptx
@@ -5,11 +5,13 @@
     <p:sldMasterId id="2147483648" r:id="rId1"/>
   </p:sldMasterIdLst>
   <p:notesMasterIdLst>
-    <p:notesMasterId r:id="rId4"/>
+    <p:notesMasterId r:id="rId6"/>
   </p:notesMasterIdLst>
   <p:sldIdLst>
-    <p:sldId id="256" r:id="rId2"/>
-    <p:sldId id="257" r:id="rId3"/>
+    <p:sldId id="258" r:id="rId2"/>
+    <p:sldId id="256" r:id="rId3"/>
+    <p:sldId id="259" r:id="rId4"/>
+    <p:sldId id="257" r:id="rId5"/>
   </p:sldIdLst>
   <p:sldSz cx="12192000" cy="6858000"/>
   <p:notesSz cx="6858000" cy="9144000"/>
@@ -108,6 +110,11 @@
       </a:defRPr>
     </a:lvl9pPr>
   </p:defaultTextStyle>
+  <p:extLst>
+    <p:ext uri="{EFAFB233-063F-42B5-8137-9DF3F51BA10A}">
+      <p15:sldGuideLst xmlns:p15="http://schemas.microsoft.com/office/powerpoint/2012/main"/>
+    </p:ext>
+  </p:extLst>
 </p:presentation>
 </file>
 
@@ -193,7 +200,7 @@
           <a:p>
             <a:fld id="{DB16C266-FE66-4646-9947-50AE4558E224}" type="datetimeFigureOut">
               <a:rPr lang="ko-KR" altLang="en-US" smtClean="0"/>
-              <a:t>2025-11-11</a:t>
+              <a:t>2025-11-14</a:t>
             </a:fld>
             <a:endParaRPr lang="ko-KR" altLang="en-US"/>
           </a:p>
@@ -566,7 +573,7 @@
           <a:p>
             <a:fld id="{C0A265B5-C822-4236-AB05-46018D6D195E}" type="slidenum">
               <a:rPr lang="ko-KR" altLang="en-US" smtClean="0"/>
-              <a:t>1</a:t>
+              <a:t>2</a:t>
             </a:fld>
             <a:endParaRPr lang="ko-KR" altLang="en-US"/>
           </a:p>
@@ -674,7 +681,7 @@
           <a:p>
             <a:fld id="{C0A265B5-C822-4236-AB05-46018D6D195E}" type="slidenum">
               <a:rPr lang="ko-KR" altLang="en-US" smtClean="0"/>
-              <a:t>2</a:t>
+              <a:t>4</a:t>
             </a:fld>
             <a:endParaRPr lang="ko-KR" altLang="en-US"/>
           </a:p>
@@ -840,7 +847,7 @@
           <a:p>
             <a:fld id="{F7181D0E-7B48-4566-A15F-1777BA2E8E43}" type="datetimeFigureOut">
               <a:rPr lang="ko-KR" altLang="en-US" smtClean="0"/>
-              <a:t>2025-11-11</a:t>
+              <a:t>2025-11-14</a:t>
             </a:fld>
             <a:endParaRPr lang="ko-KR" altLang="en-US"/>
           </a:p>
@@ -1038,7 +1045,7 @@
           <a:p>
             <a:fld id="{F7181D0E-7B48-4566-A15F-1777BA2E8E43}" type="datetimeFigureOut">
               <a:rPr lang="ko-KR" altLang="en-US" smtClean="0"/>
-              <a:t>2025-11-11</a:t>
+              <a:t>2025-11-14</a:t>
             </a:fld>
             <a:endParaRPr lang="ko-KR" altLang="en-US"/>
           </a:p>
@@ -1246,7 +1253,7 @@
           <a:p>
             <a:fld id="{F7181D0E-7B48-4566-A15F-1777BA2E8E43}" type="datetimeFigureOut">
               <a:rPr lang="ko-KR" altLang="en-US" smtClean="0"/>
-              <a:t>2025-11-11</a:t>
+              <a:t>2025-11-14</a:t>
             </a:fld>
             <a:endParaRPr lang="ko-KR" altLang="en-US"/>
           </a:p>
@@ -1444,7 +1451,7 @@
           <a:p>
             <a:fld id="{F7181D0E-7B48-4566-A15F-1777BA2E8E43}" type="datetimeFigureOut">
               <a:rPr lang="ko-KR" altLang="en-US" smtClean="0"/>
-              <a:t>2025-11-11</a:t>
+              <a:t>2025-11-14</a:t>
             </a:fld>
             <a:endParaRPr lang="ko-KR" altLang="en-US"/>
           </a:p>
@@ -1719,7 +1726,7 @@
           <a:p>
             <a:fld id="{F7181D0E-7B48-4566-A15F-1777BA2E8E43}" type="datetimeFigureOut">
               <a:rPr lang="ko-KR" altLang="en-US" smtClean="0"/>
-              <a:t>2025-11-11</a:t>
+              <a:t>2025-11-14</a:t>
             </a:fld>
             <a:endParaRPr lang="ko-KR" altLang="en-US"/>
           </a:p>
@@ -1984,7 +1991,7 @@
           <a:p>
             <a:fld id="{F7181D0E-7B48-4566-A15F-1777BA2E8E43}" type="datetimeFigureOut">
               <a:rPr lang="ko-KR" altLang="en-US" smtClean="0"/>
-              <a:t>2025-11-11</a:t>
+              <a:t>2025-11-14</a:t>
             </a:fld>
             <a:endParaRPr lang="ko-KR" altLang="en-US"/>
           </a:p>
@@ -2396,7 +2403,7 @@
           <a:p>
             <a:fld id="{F7181D0E-7B48-4566-A15F-1777BA2E8E43}" type="datetimeFigureOut">
               <a:rPr lang="ko-KR" altLang="en-US" smtClean="0"/>
-              <a:t>2025-11-11</a:t>
+              <a:t>2025-11-14</a:t>
             </a:fld>
             <a:endParaRPr lang="ko-KR" altLang="en-US"/>
           </a:p>
@@ -2537,7 +2544,7 @@
           <a:p>
             <a:fld id="{F7181D0E-7B48-4566-A15F-1777BA2E8E43}" type="datetimeFigureOut">
               <a:rPr lang="ko-KR" altLang="en-US" smtClean="0"/>
-              <a:t>2025-11-11</a:t>
+              <a:t>2025-11-14</a:t>
             </a:fld>
             <a:endParaRPr lang="ko-KR" altLang="en-US"/>
           </a:p>
@@ -2650,7 +2657,7 @@
           <a:p>
             <a:fld id="{F7181D0E-7B48-4566-A15F-1777BA2E8E43}" type="datetimeFigureOut">
               <a:rPr lang="ko-KR" altLang="en-US" smtClean="0"/>
-              <a:t>2025-11-11</a:t>
+              <a:t>2025-11-14</a:t>
             </a:fld>
             <a:endParaRPr lang="ko-KR" altLang="en-US"/>
           </a:p>
@@ -2961,7 +2968,7 @@
           <a:p>
             <a:fld id="{F7181D0E-7B48-4566-A15F-1777BA2E8E43}" type="datetimeFigureOut">
               <a:rPr lang="ko-KR" altLang="en-US" smtClean="0"/>
-              <a:t>2025-11-11</a:t>
+              <a:t>2025-11-14</a:t>
             </a:fld>
             <a:endParaRPr lang="ko-KR" altLang="en-US"/>
           </a:p>
@@ -3249,7 +3256,7 @@
           <a:p>
             <a:fld id="{F7181D0E-7B48-4566-A15F-1777BA2E8E43}" type="datetimeFigureOut">
               <a:rPr lang="ko-KR" altLang="en-US" smtClean="0"/>
-              <a:t>2025-11-11</a:t>
+              <a:t>2025-11-14</a:t>
             </a:fld>
             <a:endParaRPr lang="ko-KR" altLang="en-US"/>
           </a:p>
@@ -3490,7 +3497,7 @@
           <a:p>
             <a:fld id="{F7181D0E-7B48-4566-A15F-1777BA2E8E43}" type="datetimeFigureOut">
               <a:rPr lang="ko-KR" altLang="en-US" smtClean="0"/>
-              <a:t>2025-11-11</a:t>
+              <a:t>2025-11-14</a:t>
             </a:fld>
             <a:endParaRPr lang="ko-KR" altLang="en-US"/>
           </a:p>
@@ -3912,6 +3919,224 @@
           <p:cNvPr id="4" name="제목 3">
             <a:extLst>
               <a:ext uri="{FF2B5EF4-FFF2-40B4-BE49-F238E27FC236}">
+                <a16:creationId xmlns:a16="http://schemas.microsoft.com/office/drawing/2014/main" id="{18206B52-22B7-E7E8-23A4-4B761350EC28}"/>
+              </a:ext>
+            </a:extLst>
+          </p:cNvPr>
+          <p:cNvSpPr>
+            <a:spLocks noGrp="1"/>
+          </p:cNvSpPr>
+          <p:nvPr>
+            <p:ph type="title"/>
+          </p:nvPr>
+        </p:nvSpPr>
+        <p:spPr/>
+        <p:txBody>
+          <a:bodyPr/>
+          <a:lstStyle/>
+          <a:p>
+            <a:pPr algn="ctr"/>
+            <a:r>
+              <a:rPr lang="ko-KR" altLang="en-US" dirty="0"/>
+              <a:t>게임기 대여 서비스 개요</a:t>
+            </a:r>
+          </a:p>
+        </p:txBody>
+      </p:sp>
+      <p:sp>
+        <p:nvSpPr>
+          <p:cNvPr id="5" name="내용 개체 틀 4">
+            <a:extLst>
+              <a:ext uri="{FF2B5EF4-FFF2-40B4-BE49-F238E27FC236}">
+                <a16:creationId xmlns:a16="http://schemas.microsoft.com/office/drawing/2014/main" id="{62454F3B-3C32-C597-09C8-6C37DC646367}"/>
+              </a:ext>
+            </a:extLst>
+          </p:cNvPr>
+          <p:cNvSpPr>
+            <a:spLocks noGrp="1"/>
+          </p:cNvSpPr>
+          <p:nvPr>
+            <p:ph idx="1"/>
+          </p:nvPr>
+        </p:nvSpPr>
+        <p:spPr>
+          <a:xfrm>
+            <a:off x="389467" y="1524000"/>
+            <a:ext cx="11243733" cy="4652963"/>
+          </a:xfrm>
+        </p:spPr>
+        <p:txBody>
+          <a:bodyPr>
+            <a:normAutofit/>
+          </a:bodyPr>
+          <a:lstStyle/>
+          <a:p>
+            <a:pPr marL="0" indent="0" algn="ctr">
+              <a:buNone/>
+            </a:pPr>
+            <a:r>
+              <a:rPr lang="en-US" altLang="ko-KR" dirty="0"/>
+              <a:t>“</a:t>
+            </a:r>
+            <a:r>
+              <a:rPr lang="ko-KR" altLang="en-US" dirty="0"/>
+              <a:t>누구나 게임을 쉽게 즐기고</a:t>
+            </a:r>
+            <a:r>
+              <a:rPr lang="en-US" altLang="ko-KR" dirty="0"/>
+              <a:t>, </a:t>
+            </a:r>
+            <a:r>
+              <a:rPr lang="ko-KR" altLang="en-US" dirty="0"/>
+              <a:t>다양하게 체험하고 그 경험을 공유하며</a:t>
+            </a:r>
+            <a:r>
+              <a:rPr lang="en-US" altLang="ko-KR" dirty="0"/>
+              <a:t>, </a:t>
+            </a:r>
+            <a:r>
+              <a:rPr lang="ko-KR" altLang="en-US" dirty="0"/>
+              <a:t>신뢰 속에서 즐길 수 있는 게임 문화 플랫폼</a:t>
+            </a:r>
+            <a:r>
+              <a:rPr lang="en-US" altLang="ko-KR" dirty="0"/>
+              <a:t>”</a:t>
+            </a:r>
+          </a:p>
+          <a:p>
+            <a:pPr marL="0" indent="0" algn="ctr">
+              <a:buNone/>
+            </a:pPr>
+            <a:endParaRPr lang="en-US" altLang="ko-KR" dirty="0"/>
+          </a:p>
+          <a:p>
+            <a:pPr fontAlgn="base"/>
+            <a:r>
+              <a:rPr lang="ko-KR" altLang="en-US" dirty="0"/>
+              <a:t>고가 콘솔 기기의 접근성 개선</a:t>
+            </a:r>
+            <a:endParaRPr lang="en-US" altLang="ko-KR" dirty="0"/>
+          </a:p>
+          <a:p>
+            <a:pPr lvl="1" fontAlgn="base">
+              <a:buFont typeface="Wingdings" panose="05000000000000000000" pitchFamily="2" charset="2"/>
+              <a:buChar char="ü"/>
+            </a:pPr>
+            <a:r>
+              <a:rPr lang="ko-KR" altLang="en-US" dirty="0"/>
+              <a:t>누구나 부담 없이 최신 게임기를 경험할 수 있는 ‘합리적 대여 서비스’ 제공</a:t>
+            </a:r>
+          </a:p>
+          <a:p>
+            <a:pPr fontAlgn="base"/>
+            <a:r>
+              <a:rPr lang="ko-KR" altLang="en-US" dirty="0"/>
+              <a:t>다양한 게임 문화의 확산</a:t>
+            </a:r>
+            <a:endParaRPr lang="en-US" altLang="ko-KR" dirty="0"/>
+          </a:p>
+          <a:p>
+            <a:pPr lvl="1" fontAlgn="base">
+              <a:buFont typeface="Wingdings" panose="05000000000000000000" pitchFamily="2" charset="2"/>
+              <a:buChar char="ü"/>
+            </a:pPr>
+            <a:r>
+              <a:rPr lang="ko-KR" altLang="en-US" dirty="0"/>
+              <a:t>플랫폼에 구애 받지 않고 여러 콘솔을 체험하며</a:t>
+            </a:r>
+            <a:r>
+              <a:rPr lang="en-US" altLang="ko-KR" dirty="0"/>
+              <a:t>, </a:t>
+            </a:r>
+            <a:r>
+              <a:rPr lang="ko-KR" altLang="en-US" dirty="0"/>
+              <a:t>세대와 취향을 아우르는 게임 문화 형성</a:t>
+            </a:r>
+          </a:p>
+          <a:p>
+            <a:pPr fontAlgn="base"/>
+            <a:r>
+              <a:rPr lang="ko-KR" altLang="en-US" dirty="0"/>
+              <a:t>신뢰와 편의를 기반으로 한 대여 경험 제공</a:t>
+            </a:r>
+            <a:endParaRPr lang="en-US" altLang="ko-KR" dirty="0"/>
+          </a:p>
+          <a:p>
+            <a:pPr lvl="1" fontAlgn="base">
+              <a:buFont typeface="Wingdings" panose="05000000000000000000" pitchFamily="2" charset="2"/>
+              <a:buChar char="ü"/>
+            </a:pPr>
+            <a:r>
+              <a:rPr lang="ko-KR" altLang="en-US" dirty="0"/>
+              <a:t>안전한 거래</a:t>
+            </a:r>
+            <a:r>
+              <a:rPr lang="en-US" altLang="ko-KR" dirty="0"/>
+              <a:t>, </a:t>
+            </a:r>
+            <a:r>
+              <a:rPr lang="ko-KR" altLang="en-US" dirty="0"/>
+              <a:t>간편한 이용</a:t>
+            </a:r>
+            <a:r>
+              <a:rPr lang="en-US" altLang="ko-KR" dirty="0"/>
+              <a:t>, </a:t>
+            </a:r>
+            <a:r>
+              <a:rPr lang="ko-KR" altLang="en-US" dirty="0"/>
+              <a:t>스마트한 관리 시스템으로 사용자 만족도 향상</a:t>
+            </a:r>
+            <a:r>
+              <a:rPr lang="en-US" altLang="ko-KR" dirty="0"/>
+              <a:t>	</a:t>
+            </a:r>
+            <a:endParaRPr lang="ko-KR" altLang="en-US" dirty="0"/>
+          </a:p>
+          <a:p>
+            <a:pPr algn="ctr"/>
+            <a:endParaRPr lang="ko-KR" altLang="en-US" dirty="0"/>
+          </a:p>
+          <a:p>
+            <a:pPr algn="ctr"/>
+            <a:endParaRPr lang="ko-KR" altLang="en-US" dirty="0"/>
+          </a:p>
+        </p:txBody>
+      </p:sp>
+    </p:spTree>
+    <p:extLst>
+      <p:ext uri="{BB962C8B-B14F-4D97-AF65-F5344CB8AC3E}">
+        <p14:creationId xmlns:p14="http://schemas.microsoft.com/office/powerpoint/2010/main" val="617443707"/>
+      </p:ext>
+    </p:extLst>
+  </p:cSld>
+  <p:clrMapOvr>
+    <a:masterClrMapping/>
+  </p:clrMapOvr>
+</p:sld>
+</file>
+
+<file path=ppt/slides/slide2.xml><?xml version="1.0" encoding="utf-8"?>
+<p:sld xmlns:a="http://schemas.openxmlformats.org/drawingml/2006/main" xmlns:r="http://schemas.openxmlformats.org/officeDocument/2006/relationships" xmlns:p="http://schemas.openxmlformats.org/presentationml/2006/main">
+  <p:cSld>
+    <p:spTree>
+      <p:nvGrpSpPr>
+        <p:cNvPr id="1" name=""/>
+        <p:cNvGrpSpPr/>
+        <p:nvPr/>
+      </p:nvGrpSpPr>
+      <p:grpSpPr>
+        <a:xfrm>
+          <a:off x="0" y="0"/>
+          <a:ext cx="0" cy="0"/>
+          <a:chOff x="0" y="0"/>
+          <a:chExt cx="0" cy="0"/>
+        </a:xfrm>
+      </p:grpSpPr>
+      <p:sp>
+        <p:nvSpPr>
+          <p:cNvPr id="4" name="제목 3">
+            <a:extLst>
+              <a:ext uri="{FF2B5EF4-FFF2-40B4-BE49-F238E27FC236}">
                 <a16:creationId xmlns:a16="http://schemas.microsoft.com/office/drawing/2014/main" id="{DBC8DF00-C5FC-F8C9-35A3-58BB12506FB4}"/>
               </a:ext>
             </a:extLst>
@@ -4852,7 +5077,97 @@
 </p:sld>
 </file>
 
-<file path=ppt/slides/slide2.xml><?xml version="1.0" encoding="utf-8"?>
+<file path=ppt/slides/slide3.xml><?xml version="1.0" encoding="utf-8"?>
+<p:sld xmlns:a="http://schemas.openxmlformats.org/drawingml/2006/main" xmlns:r="http://schemas.openxmlformats.org/officeDocument/2006/relationships" xmlns:p="http://schemas.openxmlformats.org/presentationml/2006/main">
+  <p:cSld>
+    <p:spTree>
+      <p:nvGrpSpPr>
+        <p:cNvPr id="1" name=""/>
+        <p:cNvGrpSpPr/>
+        <p:nvPr/>
+      </p:nvGrpSpPr>
+      <p:grpSpPr>
+        <a:xfrm>
+          <a:off x="0" y="0"/>
+          <a:ext cx="0" cy="0"/>
+          <a:chOff x="0" y="0"/>
+          <a:chExt cx="0" cy="0"/>
+        </a:xfrm>
+      </p:grpSpPr>
+      <p:sp>
+        <p:nvSpPr>
+          <p:cNvPr id="2" name="제목 1">
+            <a:extLst>
+              <a:ext uri="{FF2B5EF4-FFF2-40B4-BE49-F238E27FC236}">
+                <a16:creationId xmlns:a16="http://schemas.microsoft.com/office/drawing/2014/main" id="{3BE30AFA-B5B0-3491-39EF-72C970227AA9}"/>
+              </a:ext>
+            </a:extLst>
+          </p:cNvPr>
+          <p:cNvSpPr>
+            <a:spLocks noGrp="1"/>
+          </p:cNvSpPr>
+          <p:nvPr>
+            <p:ph type="title"/>
+          </p:nvPr>
+        </p:nvSpPr>
+        <p:spPr/>
+        <p:txBody>
+          <a:bodyPr/>
+          <a:lstStyle/>
+          <a:p>
+            <a:endParaRPr lang="ko-KR" altLang="en-US"/>
+          </a:p>
+        </p:txBody>
+      </p:sp>
+      <p:pic>
+        <p:nvPicPr>
+          <p:cNvPr id="5" name="내용 개체 틀 4">
+            <a:extLst>
+              <a:ext uri="{FF2B5EF4-FFF2-40B4-BE49-F238E27FC236}">
+                <a16:creationId xmlns:a16="http://schemas.microsoft.com/office/drawing/2014/main" id="{1F383202-6058-DB23-D848-E355185549FC}"/>
+              </a:ext>
+            </a:extLst>
+          </p:cNvPr>
+          <p:cNvPicPr>
+            <a:picLocks noGrp="1" noChangeAspect="1"/>
+          </p:cNvPicPr>
+          <p:nvPr>
+            <p:ph idx="1"/>
+          </p:nvPr>
+        </p:nvPicPr>
+        <p:blipFill>
+          <a:blip r:embed="rId2">
+            <a:extLst>
+              <a:ext uri="{28A0092B-C50C-407E-A947-70E740481C1C}">
+                <a14:useLocalDpi xmlns:a14="http://schemas.microsoft.com/office/drawing/2010/main" val="0"/>
+              </a:ext>
+            </a:extLst>
+          </a:blip>
+          <a:stretch>
+            <a:fillRect/>
+          </a:stretch>
+        </p:blipFill>
+        <p:spPr>
+          <a:xfrm>
+            <a:off x="0" y="-1"/>
+            <a:ext cx="12192000" cy="6858001"/>
+          </a:xfrm>
+        </p:spPr>
+      </p:pic>
+    </p:spTree>
+    <p:extLst>
+      <p:ext uri="{BB962C8B-B14F-4D97-AF65-F5344CB8AC3E}">
+        <p14:creationId xmlns:p14="http://schemas.microsoft.com/office/powerpoint/2010/main" val="33770104"/>
+      </p:ext>
+    </p:extLst>
+  </p:cSld>
+  <p:clrMapOvr>
+    <a:masterClrMapping/>
+  </p:clrMapOvr>
+</p:sld>
+</file>
+
+<file path=ppt/slides/slide4.xml><?xml version="1.0" encoding="utf-8"?>
 <p:sld xmlns:a="http://schemas.openxmlformats.org/drawingml/2006/main" xmlns:r="http://schemas.openxmlformats.org/officeDocument/2006/relationships" xmlns:p="http://schemas.openxmlformats.org/presentationml/2006/main">
   <p:cSld>
     <p:spTree>
